--- a/assets/files/morph-transition.pptx
+++ b/assets/files/morph-transition.pptx
@@ -130,7 +130,7 @@
           <p:cNvPr id="2" name="Title 1">
             <a:extLst>
               <a:ext uri="{FF2B5EF4-FFF2-40B4-BE49-F238E27FC236}">
-                <a16:creationId xmlns:a16="http://schemas.microsoft.com/office/drawing/2014/main" id="{8D0B0F71-0407-A834-DAAA-055EB398FE8A}"/>
+                <a16:creationId xmlns:a16="http://schemas.microsoft.com/office/drawing/2014/main" id="{8D18A9CE-F193-3A35-66C8-D27D8AE20D1D}"/>
               </a:ext>
             </a:extLst>
           </p:cNvPr>
@@ -168,7 +168,7 @@
           <p:cNvPr id="3" name="Subtitle 2">
             <a:extLst>
               <a:ext uri="{FF2B5EF4-FFF2-40B4-BE49-F238E27FC236}">
-                <a16:creationId xmlns:a16="http://schemas.microsoft.com/office/drawing/2014/main" id="{F82F0324-4BF2-B79E-9795-C11318767E55}"/>
+                <a16:creationId xmlns:a16="http://schemas.microsoft.com/office/drawing/2014/main" id="{536681BE-D08D-00BB-C8E1-6DC6D03E5317}"/>
               </a:ext>
             </a:extLst>
           </p:cNvPr>
@@ -239,7 +239,7 @@
           <p:cNvPr id="4" name="Date Placeholder 3">
             <a:extLst>
               <a:ext uri="{FF2B5EF4-FFF2-40B4-BE49-F238E27FC236}">
-                <a16:creationId xmlns:a16="http://schemas.microsoft.com/office/drawing/2014/main" id="{1F72A13A-173D-CDE7-E14A-9CC81FCC1B9C}"/>
+                <a16:creationId xmlns:a16="http://schemas.microsoft.com/office/drawing/2014/main" id="{15406F0E-E446-1543-658A-319F742C891B}"/>
               </a:ext>
             </a:extLst>
           </p:cNvPr>
@@ -255,9 +255,9 @@
           <a:bodyPr/>
           <a:lstStyle/>
           <a:p>
-            <a:fld id="{AD2783CA-6D73-4D0A-ABF8-35B96CFF689C}" type="datetimeFigureOut">
+            <a:fld id="{961963D1-593A-43BF-8347-20539A7EE1EC}" type="datetimeFigureOut">
               <a:rPr lang="id-ID" smtClean="0"/>
-              <a:t>26/06/2026</a:t>
+              <a:t>27/06/2026</a:t>
             </a:fld>
             <a:endParaRPr lang="id-ID"/>
           </a:p>
@@ -268,7 +268,7 @@
           <p:cNvPr id="5" name="Footer Placeholder 4">
             <a:extLst>
               <a:ext uri="{FF2B5EF4-FFF2-40B4-BE49-F238E27FC236}">
-                <a16:creationId xmlns:a16="http://schemas.microsoft.com/office/drawing/2014/main" id="{624E1275-2A2D-B737-7379-52BD5935776C}"/>
+                <a16:creationId xmlns:a16="http://schemas.microsoft.com/office/drawing/2014/main" id="{2471A852-E317-6B46-2B6F-60E689C9A276}"/>
               </a:ext>
             </a:extLst>
           </p:cNvPr>
@@ -293,7 +293,7 @@
           <p:cNvPr id="6" name="Slide Number Placeholder 5">
             <a:extLst>
               <a:ext uri="{FF2B5EF4-FFF2-40B4-BE49-F238E27FC236}">
-                <a16:creationId xmlns:a16="http://schemas.microsoft.com/office/drawing/2014/main" id="{E081F21D-8D1D-9C3F-95F9-1EB3B9736D13}"/>
+                <a16:creationId xmlns:a16="http://schemas.microsoft.com/office/drawing/2014/main" id="{B70D111F-5137-29F9-20FF-259DEB199E64}"/>
               </a:ext>
             </a:extLst>
           </p:cNvPr>
@@ -309,7 +309,7 @@
           <a:bodyPr/>
           <a:lstStyle/>
           <a:p>
-            <a:fld id="{6F6667F1-D0DD-4C9D-AF8F-80804D176A09}" type="slidenum">
+            <a:fld id="{4286C5A5-18D4-4278-8F18-A6DEB4D1F1F4}" type="slidenum">
               <a:rPr lang="id-ID" smtClean="0"/>
               <a:t>‹#›</a:t>
             </a:fld>
@@ -320,7 +320,7 @@
     </p:spTree>
     <p:extLst>
       <p:ext uri="{BB962C8B-B14F-4D97-AF65-F5344CB8AC3E}">
-        <p14:creationId xmlns:p14="http://schemas.microsoft.com/office/powerpoint/2010/main" val="458080403"/>
+        <p14:creationId xmlns:p14="http://schemas.microsoft.com/office/powerpoint/2010/main" val="880411641"/>
       </p:ext>
     </p:extLst>
   </p:cSld>
@@ -352,7 +352,7 @@
           <p:cNvPr id="2" name="Title 1">
             <a:extLst>
               <a:ext uri="{FF2B5EF4-FFF2-40B4-BE49-F238E27FC236}">
-                <a16:creationId xmlns:a16="http://schemas.microsoft.com/office/drawing/2014/main" id="{5BEE73CF-1662-085B-88FE-0858C1D0A4E2}"/>
+                <a16:creationId xmlns:a16="http://schemas.microsoft.com/office/drawing/2014/main" id="{1A99B15A-6DF8-DC7F-31BA-69253CDC445A}"/>
               </a:ext>
             </a:extLst>
           </p:cNvPr>
@@ -381,7 +381,7 @@
           <p:cNvPr id="3" name="Vertical Text Placeholder 2">
             <a:extLst>
               <a:ext uri="{FF2B5EF4-FFF2-40B4-BE49-F238E27FC236}">
-                <a16:creationId xmlns:a16="http://schemas.microsoft.com/office/drawing/2014/main" id="{D999476D-066E-DD6B-634A-930BC3A36B82}"/>
+                <a16:creationId xmlns:a16="http://schemas.microsoft.com/office/drawing/2014/main" id="{3F97E8DB-019C-78E2-8FEF-D11187223554}"/>
               </a:ext>
             </a:extLst>
           </p:cNvPr>
@@ -439,7 +439,7 @@
           <p:cNvPr id="4" name="Date Placeholder 3">
             <a:extLst>
               <a:ext uri="{FF2B5EF4-FFF2-40B4-BE49-F238E27FC236}">
-                <a16:creationId xmlns:a16="http://schemas.microsoft.com/office/drawing/2014/main" id="{72343862-4405-63E5-5847-E10D3CDAC616}"/>
+                <a16:creationId xmlns:a16="http://schemas.microsoft.com/office/drawing/2014/main" id="{796CB6AD-2F9F-6B51-458E-FC582FBA9FCD}"/>
               </a:ext>
             </a:extLst>
           </p:cNvPr>
@@ -455,9 +455,9 @@
           <a:bodyPr/>
           <a:lstStyle/>
           <a:p>
-            <a:fld id="{AD2783CA-6D73-4D0A-ABF8-35B96CFF689C}" type="datetimeFigureOut">
+            <a:fld id="{961963D1-593A-43BF-8347-20539A7EE1EC}" type="datetimeFigureOut">
               <a:rPr lang="id-ID" smtClean="0"/>
-              <a:t>26/06/2026</a:t>
+              <a:t>27/06/2026</a:t>
             </a:fld>
             <a:endParaRPr lang="id-ID"/>
           </a:p>
@@ -468,7 +468,7 @@
           <p:cNvPr id="5" name="Footer Placeholder 4">
             <a:extLst>
               <a:ext uri="{FF2B5EF4-FFF2-40B4-BE49-F238E27FC236}">
-                <a16:creationId xmlns:a16="http://schemas.microsoft.com/office/drawing/2014/main" id="{69D295E6-968E-455D-7B22-15F1BD9AB1C7}"/>
+                <a16:creationId xmlns:a16="http://schemas.microsoft.com/office/drawing/2014/main" id="{7100A8E6-94E5-6638-6637-888F14F521AF}"/>
               </a:ext>
             </a:extLst>
           </p:cNvPr>
@@ -493,7 +493,7 @@
           <p:cNvPr id="6" name="Slide Number Placeholder 5">
             <a:extLst>
               <a:ext uri="{FF2B5EF4-FFF2-40B4-BE49-F238E27FC236}">
-                <a16:creationId xmlns:a16="http://schemas.microsoft.com/office/drawing/2014/main" id="{E6CDA67F-0975-2919-006B-95ACD32CF8CD}"/>
+                <a16:creationId xmlns:a16="http://schemas.microsoft.com/office/drawing/2014/main" id="{B42DFB38-F8D1-836B-F55B-31F476C6F226}"/>
               </a:ext>
             </a:extLst>
           </p:cNvPr>
@@ -509,7 +509,7 @@
           <a:bodyPr/>
           <a:lstStyle/>
           <a:p>
-            <a:fld id="{6F6667F1-D0DD-4C9D-AF8F-80804D176A09}" type="slidenum">
+            <a:fld id="{4286C5A5-18D4-4278-8F18-A6DEB4D1F1F4}" type="slidenum">
               <a:rPr lang="id-ID" smtClean="0"/>
               <a:t>‹#›</a:t>
             </a:fld>
@@ -520,7 +520,7 @@
     </p:spTree>
     <p:extLst>
       <p:ext uri="{BB962C8B-B14F-4D97-AF65-F5344CB8AC3E}">
-        <p14:creationId xmlns:p14="http://schemas.microsoft.com/office/powerpoint/2010/main" val="2030755770"/>
+        <p14:creationId xmlns:p14="http://schemas.microsoft.com/office/powerpoint/2010/main" val="1573035476"/>
       </p:ext>
     </p:extLst>
   </p:cSld>
@@ -552,7 +552,7 @@
           <p:cNvPr id="2" name="Vertical Title 1">
             <a:extLst>
               <a:ext uri="{FF2B5EF4-FFF2-40B4-BE49-F238E27FC236}">
-                <a16:creationId xmlns:a16="http://schemas.microsoft.com/office/drawing/2014/main" id="{2D98EAC6-435E-4DED-C3D0-507BF96A23AC}"/>
+                <a16:creationId xmlns:a16="http://schemas.microsoft.com/office/drawing/2014/main" id="{8AE64280-98AB-5D0A-243F-FA8D72913EB9}"/>
               </a:ext>
             </a:extLst>
           </p:cNvPr>
@@ -586,7 +586,7 @@
           <p:cNvPr id="3" name="Vertical Text Placeholder 2">
             <a:extLst>
               <a:ext uri="{FF2B5EF4-FFF2-40B4-BE49-F238E27FC236}">
-                <a16:creationId xmlns:a16="http://schemas.microsoft.com/office/drawing/2014/main" id="{0A492BB2-0188-3E24-7F54-C8DD2645ACC3}"/>
+                <a16:creationId xmlns:a16="http://schemas.microsoft.com/office/drawing/2014/main" id="{836A8AD4-5885-5CBA-00F9-142A434A853C}"/>
               </a:ext>
             </a:extLst>
           </p:cNvPr>
@@ -649,7 +649,7 @@
           <p:cNvPr id="4" name="Date Placeholder 3">
             <a:extLst>
               <a:ext uri="{FF2B5EF4-FFF2-40B4-BE49-F238E27FC236}">
-                <a16:creationId xmlns:a16="http://schemas.microsoft.com/office/drawing/2014/main" id="{85CC40B2-CF74-5C53-AFD7-3BB85F3436E3}"/>
+                <a16:creationId xmlns:a16="http://schemas.microsoft.com/office/drawing/2014/main" id="{9F448894-4EB1-2248-C178-87D6A390D336}"/>
               </a:ext>
             </a:extLst>
           </p:cNvPr>
@@ -665,9 +665,9 @@
           <a:bodyPr/>
           <a:lstStyle/>
           <a:p>
-            <a:fld id="{AD2783CA-6D73-4D0A-ABF8-35B96CFF689C}" type="datetimeFigureOut">
+            <a:fld id="{961963D1-593A-43BF-8347-20539A7EE1EC}" type="datetimeFigureOut">
               <a:rPr lang="id-ID" smtClean="0"/>
-              <a:t>26/06/2026</a:t>
+              <a:t>27/06/2026</a:t>
             </a:fld>
             <a:endParaRPr lang="id-ID"/>
           </a:p>
@@ -678,7 +678,7 @@
           <p:cNvPr id="5" name="Footer Placeholder 4">
             <a:extLst>
               <a:ext uri="{FF2B5EF4-FFF2-40B4-BE49-F238E27FC236}">
-                <a16:creationId xmlns:a16="http://schemas.microsoft.com/office/drawing/2014/main" id="{441B9508-1AAB-2A83-1E44-A2DAE4063815}"/>
+                <a16:creationId xmlns:a16="http://schemas.microsoft.com/office/drawing/2014/main" id="{83406142-63C7-8777-84DE-9D408D3D2498}"/>
               </a:ext>
             </a:extLst>
           </p:cNvPr>
@@ -703,7 +703,7 @@
           <p:cNvPr id="6" name="Slide Number Placeholder 5">
             <a:extLst>
               <a:ext uri="{FF2B5EF4-FFF2-40B4-BE49-F238E27FC236}">
-                <a16:creationId xmlns:a16="http://schemas.microsoft.com/office/drawing/2014/main" id="{06D5D35D-15C8-DE49-16C1-AF9735E71C59}"/>
+                <a16:creationId xmlns:a16="http://schemas.microsoft.com/office/drawing/2014/main" id="{AA4B5FB0-499D-CDF3-9398-BE864724AC4F}"/>
               </a:ext>
             </a:extLst>
           </p:cNvPr>
@@ -719,7 +719,7 @@
           <a:bodyPr/>
           <a:lstStyle/>
           <a:p>
-            <a:fld id="{6F6667F1-D0DD-4C9D-AF8F-80804D176A09}" type="slidenum">
+            <a:fld id="{4286C5A5-18D4-4278-8F18-A6DEB4D1F1F4}" type="slidenum">
               <a:rPr lang="id-ID" smtClean="0"/>
               <a:t>‹#›</a:t>
             </a:fld>
@@ -730,7 +730,7 @@
     </p:spTree>
     <p:extLst>
       <p:ext uri="{BB962C8B-B14F-4D97-AF65-F5344CB8AC3E}">
-        <p14:creationId xmlns:p14="http://schemas.microsoft.com/office/powerpoint/2010/main" val="623949847"/>
+        <p14:creationId xmlns:p14="http://schemas.microsoft.com/office/powerpoint/2010/main" val="835808849"/>
       </p:ext>
     </p:extLst>
   </p:cSld>
@@ -762,7 +762,7 @@
           <p:cNvPr id="2" name="Title 1">
             <a:extLst>
               <a:ext uri="{FF2B5EF4-FFF2-40B4-BE49-F238E27FC236}">
-                <a16:creationId xmlns:a16="http://schemas.microsoft.com/office/drawing/2014/main" id="{3471B978-296C-3B1F-A290-867ACACA0C9A}"/>
+                <a16:creationId xmlns:a16="http://schemas.microsoft.com/office/drawing/2014/main" id="{A2AC1438-C72E-365E-5188-330225D2A93F}"/>
               </a:ext>
             </a:extLst>
           </p:cNvPr>
@@ -791,7 +791,7 @@
           <p:cNvPr id="3" name="Content Placeholder 2">
             <a:extLst>
               <a:ext uri="{FF2B5EF4-FFF2-40B4-BE49-F238E27FC236}">
-                <a16:creationId xmlns:a16="http://schemas.microsoft.com/office/drawing/2014/main" id="{BFF6CC11-B04F-1355-88BF-54BE64289708}"/>
+                <a16:creationId xmlns:a16="http://schemas.microsoft.com/office/drawing/2014/main" id="{3928EB70-A071-4A6A-4F3B-B22F9444DC29}"/>
               </a:ext>
             </a:extLst>
           </p:cNvPr>
@@ -849,7 +849,7 @@
           <p:cNvPr id="4" name="Date Placeholder 3">
             <a:extLst>
               <a:ext uri="{FF2B5EF4-FFF2-40B4-BE49-F238E27FC236}">
-                <a16:creationId xmlns:a16="http://schemas.microsoft.com/office/drawing/2014/main" id="{E6644F10-EF6A-74CE-4FD8-41399261AFE3}"/>
+                <a16:creationId xmlns:a16="http://schemas.microsoft.com/office/drawing/2014/main" id="{9D14EBC4-8D18-F107-BBB1-4A7E2B4F9523}"/>
               </a:ext>
             </a:extLst>
           </p:cNvPr>
@@ -865,9 +865,9 @@
           <a:bodyPr/>
           <a:lstStyle/>
           <a:p>
-            <a:fld id="{AD2783CA-6D73-4D0A-ABF8-35B96CFF689C}" type="datetimeFigureOut">
+            <a:fld id="{961963D1-593A-43BF-8347-20539A7EE1EC}" type="datetimeFigureOut">
               <a:rPr lang="id-ID" smtClean="0"/>
-              <a:t>26/06/2026</a:t>
+              <a:t>27/06/2026</a:t>
             </a:fld>
             <a:endParaRPr lang="id-ID"/>
           </a:p>
@@ -878,7 +878,7 @@
           <p:cNvPr id="5" name="Footer Placeholder 4">
             <a:extLst>
               <a:ext uri="{FF2B5EF4-FFF2-40B4-BE49-F238E27FC236}">
-                <a16:creationId xmlns:a16="http://schemas.microsoft.com/office/drawing/2014/main" id="{1F13FBE9-F4FE-414A-3B54-0E1408FBFC51}"/>
+                <a16:creationId xmlns:a16="http://schemas.microsoft.com/office/drawing/2014/main" id="{B5AA2F65-6A0D-58CB-0AEA-DDC2ACBFA774}"/>
               </a:ext>
             </a:extLst>
           </p:cNvPr>
@@ -903,7 +903,7 @@
           <p:cNvPr id="6" name="Slide Number Placeholder 5">
             <a:extLst>
               <a:ext uri="{FF2B5EF4-FFF2-40B4-BE49-F238E27FC236}">
-                <a16:creationId xmlns:a16="http://schemas.microsoft.com/office/drawing/2014/main" id="{D77D9E5E-345D-76C8-7A58-A9C40741438C}"/>
+                <a16:creationId xmlns:a16="http://schemas.microsoft.com/office/drawing/2014/main" id="{3C12E2B9-5CC8-E969-2BD5-4CEA247F5A44}"/>
               </a:ext>
             </a:extLst>
           </p:cNvPr>
@@ -919,7 +919,7 @@
           <a:bodyPr/>
           <a:lstStyle/>
           <a:p>
-            <a:fld id="{6F6667F1-D0DD-4C9D-AF8F-80804D176A09}" type="slidenum">
+            <a:fld id="{4286C5A5-18D4-4278-8F18-A6DEB4D1F1F4}" type="slidenum">
               <a:rPr lang="id-ID" smtClean="0"/>
               <a:t>‹#›</a:t>
             </a:fld>
@@ -930,7 +930,7 @@
     </p:spTree>
     <p:extLst>
       <p:ext uri="{BB962C8B-B14F-4D97-AF65-F5344CB8AC3E}">
-        <p14:creationId xmlns:p14="http://schemas.microsoft.com/office/powerpoint/2010/main" val="3649524143"/>
+        <p14:creationId xmlns:p14="http://schemas.microsoft.com/office/powerpoint/2010/main" val="4124914901"/>
       </p:ext>
     </p:extLst>
   </p:cSld>
@@ -962,7 +962,7 @@
           <p:cNvPr id="2" name="Title 1">
             <a:extLst>
               <a:ext uri="{FF2B5EF4-FFF2-40B4-BE49-F238E27FC236}">
-                <a16:creationId xmlns:a16="http://schemas.microsoft.com/office/drawing/2014/main" id="{F55FD703-1AC1-69F7-C06D-52D3BCAD4650}"/>
+                <a16:creationId xmlns:a16="http://schemas.microsoft.com/office/drawing/2014/main" id="{16369285-7FDB-ECE6-C837-1DC24C62353A}"/>
               </a:ext>
             </a:extLst>
           </p:cNvPr>
@@ -1000,7 +1000,7 @@
           <p:cNvPr id="3" name="Text Placeholder 2">
             <a:extLst>
               <a:ext uri="{FF2B5EF4-FFF2-40B4-BE49-F238E27FC236}">
-                <a16:creationId xmlns:a16="http://schemas.microsoft.com/office/drawing/2014/main" id="{36A2B7C2-1206-0C0E-C11D-7AF90F54C9A6}"/>
+                <a16:creationId xmlns:a16="http://schemas.microsoft.com/office/drawing/2014/main" id="{9D88FFC6-62BE-A1CF-DEAA-0DE9E8219BD2}"/>
               </a:ext>
             </a:extLst>
           </p:cNvPr>
@@ -1125,7 +1125,7 @@
           <p:cNvPr id="4" name="Date Placeholder 3">
             <a:extLst>
               <a:ext uri="{FF2B5EF4-FFF2-40B4-BE49-F238E27FC236}">
-                <a16:creationId xmlns:a16="http://schemas.microsoft.com/office/drawing/2014/main" id="{69752D42-5877-A928-F389-58D0C0532F1D}"/>
+                <a16:creationId xmlns:a16="http://schemas.microsoft.com/office/drawing/2014/main" id="{8D1F0E9A-BB37-42FC-B64E-FAC464CF310F}"/>
               </a:ext>
             </a:extLst>
           </p:cNvPr>
@@ -1141,9 +1141,9 @@
           <a:bodyPr/>
           <a:lstStyle/>
           <a:p>
-            <a:fld id="{AD2783CA-6D73-4D0A-ABF8-35B96CFF689C}" type="datetimeFigureOut">
+            <a:fld id="{961963D1-593A-43BF-8347-20539A7EE1EC}" type="datetimeFigureOut">
               <a:rPr lang="id-ID" smtClean="0"/>
-              <a:t>26/06/2026</a:t>
+              <a:t>27/06/2026</a:t>
             </a:fld>
             <a:endParaRPr lang="id-ID"/>
           </a:p>
@@ -1154,7 +1154,7 @@
           <p:cNvPr id="5" name="Footer Placeholder 4">
             <a:extLst>
               <a:ext uri="{FF2B5EF4-FFF2-40B4-BE49-F238E27FC236}">
-                <a16:creationId xmlns:a16="http://schemas.microsoft.com/office/drawing/2014/main" id="{47DBCC7B-5E87-054C-2F0A-78C7B7387AEC}"/>
+                <a16:creationId xmlns:a16="http://schemas.microsoft.com/office/drawing/2014/main" id="{5539923B-2B2A-B4DB-0512-DE0599FF88CE}"/>
               </a:ext>
             </a:extLst>
           </p:cNvPr>
@@ -1179,7 +1179,7 @@
           <p:cNvPr id="6" name="Slide Number Placeholder 5">
             <a:extLst>
               <a:ext uri="{FF2B5EF4-FFF2-40B4-BE49-F238E27FC236}">
-                <a16:creationId xmlns:a16="http://schemas.microsoft.com/office/drawing/2014/main" id="{31B3BBDF-FB26-9459-943D-2F23D17F6C51}"/>
+                <a16:creationId xmlns:a16="http://schemas.microsoft.com/office/drawing/2014/main" id="{912F42D8-CFCE-ACBA-5E67-31B8D08EA3EC}"/>
               </a:ext>
             </a:extLst>
           </p:cNvPr>
@@ -1195,7 +1195,7 @@
           <a:bodyPr/>
           <a:lstStyle/>
           <a:p>
-            <a:fld id="{6F6667F1-D0DD-4C9D-AF8F-80804D176A09}" type="slidenum">
+            <a:fld id="{4286C5A5-18D4-4278-8F18-A6DEB4D1F1F4}" type="slidenum">
               <a:rPr lang="id-ID" smtClean="0"/>
               <a:t>‹#›</a:t>
             </a:fld>
@@ -1206,7 +1206,7 @@
     </p:spTree>
     <p:extLst>
       <p:ext uri="{BB962C8B-B14F-4D97-AF65-F5344CB8AC3E}">
-        <p14:creationId xmlns:p14="http://schemas.microsoft.com/office/powerpoint/2010/main" val="3617702594"/>
+        <p14:creationId xmlns:p14="http://schemas.microsoft.com/office/powerpoint/2010/main" val="511439790"/>
       </p:ext>
     </p:extLst>
   </p:cSld>
@@ -1238,7 +1238,7 @@
           <p:cNvPr id="2" name="Title 1">
             <a:extLst>
               <a:ext uri="{FF2B5EF4-FFF2-40B4-BE49-F238E27FC236}">
-                <a16:creationId xmlns:a16="http://schemas.microsoft.com/office/drawing/2014/main" id="{4F74C652-D49F-48DD-C117-A2302462D793}"/>
+                <a16:creationId xmlns:a16="http://schemas.microsoft.com/office/drawing/2014/main" id="{5A8A6206-F759-68B3-9D63-A46A0007E55B}"/>
               </a:ext>
             </a:extLst>
           </p:cNvPr>
@@ -1267,7 +1267,7 @@
           <p:cNvPr id="3" name="Content Placeholder 2">
             <a:extLst>
               <a:ext uri="{FF2B5EF4-FFF2-40B4-BE49-F238E27FC236}">
-                <a16:creationId xmlns:a16="http://schemas.microsoft.com/office/drawing/2014/main" id="{598284B8-C215-EE25-C95E-555515B3C9B2}"/>
+                <a16:creationId xmlns:a16="http://schemas.microsoft.com/office/drawing/2014/main" id="{3379FD7A-C4E8-613A-0C1E-0102C7958955}"/>
               </a:ext>
             </a:extLst>
           </p:cNvPr>
@@ -1330,7 +1330,7 @@
           <p:cNvPr id="4" name="Content Placeholder 3">
             <a:extLst>
               <a:ext uri="{FF2B5EF4-FFF2-40B4-BE49-F238E27FC236}">
-                <a16:creationId xmlns:a16="http://schemas.microsoft.com/office/drawing/2014/main" id="{F3548038-443B-4E05-0B23-E72D527F6E40}"/>
+                <a16:creationId xmlns:a16="http://schemas.microsoft.com/office/drawing/2014/main" id="{41EB5BD7-4D4D-690B-DCA8-6430500EC7DE}"/>
               </a:ext>
             </a:extLst>
           </p:cNvPr>
@@ -1393,7 +1393,7 @@
           <p:cNvPr id="5" name="Date Placeholder 4">
             <a:extLst>
               <a:ext uri="{FF2B5EF4-FFF2-40B4-BE49-F238E27FC236}">
-                <a16:creationId xmlns:a16="http://schemas.microsoft.com/office/drawing/2014/main" id="{48958ACF-2683-9FD1-10BC-6E99D8A82390}"/>
+                <a16:creationId xmlns:a16="http://schemas.microsoft.com/office/drawing/2014/main" id="{69B7AA95-E7D3-90B4-BBB3-199F4250F592}"/>
               </a:ext>
             </a:extLst>
           </p:cNvPr>
@@ -1409,9 +1409,9 @@
           <a:bodyPr/>
           <a:lstStyle/>
           <a:p>
-            <a:fld id="{AD2783CA-6D73-4D0A-ABF8-35B96CFF689C}" type="datetimeFigureOut">
+            <a:fld id="{961963D1-593A-43BF-8347-20539A7EE1EC}" type="datetimeFigureOut">
               <a:rPr lang="id-ID" smtClean="0"/>
-              <a:t>26/06/2026</a:t>
+              <a:t>27/06/2026</a:t>
             </a:fld>
             <a:endParaRPr lang="id-ID"/>
           </a:p>
@@ -1422,7 +1422,7 @@
           <p:cNvPr id="6" name="Footer Placeholder 5">
             <a:extLst>
               <a:ext uri="{FF2B5EF4-FFF2-40B4-BE49-F238E27FC236}">
-                <a16:creationId xmlns:a16="http://schemas.microsoft.com/office/drawing/2014/main" id="{5005F019-46FB-1A34-3FE2-08A5CE8C9677}"/>
+                <a16:creationId xmlns:a16="http://schemas.microsoft.com/office/drawing/2014/main" id="{1EC4CFE6-BD9A-0028-460C-D80ECC326478}"/>
               </a:ext>
             </a:extLst>
           </p:cNvPr>
@@ -1447,7 +1447,7 @@
           <p:cNvPr id="7" name="Slide Number Placeholder 6">
             <a:extLst>
               <a:ext uri="{FF2B5EF4-FFF2-40B4-BE49-F238E27FC236}">
-                <a16:creationId xmlns:a16="http://schemas.microsoft.com/office/drawing/2014/main" id="{A361DD5F-2AE3-439C-7A44-8CE1DBD8E57D}"/>
+                <a16:creationId xmlns:a16="http://schemas.microsoft.com/office/drawing/2014/main" id="{E09AF2AF-E71A-3911-5BFD-FABF9729DE33}"/>
               </a:ext>
             </a:extLst>
           </p:cNvPr>
@@ -1463,7 +1463,7 @@
           <a:bodyPr/>
           <a:lstStyle/>
           <a:p>
-            <a:fld id="{6F6667F1-D0DD-4C9D-AF8F-80804D176A09}" type="slidenum">
+            <a:fld id="{4286C5A5-18D4-4278-8F18-A6DEB4D1F1F4}" type="slidenum">
               <a:rPr lang="id-ID" smtClean="0"/>
               <a:t>‹#›</a:t>
             </a:fld>
@@ -1474,7 +1474,7 @@
     </p:spTree>
     <p:extLst>
       <p:ext uri="{BB962C8B-B14F-4D97-AF65-F5344CB8AC3E}">
-        <p14:creationId xmlns:p14="http://schemas.microsoft.com/office/powerpoint/2010/main" val="1091870772"/>
+        <p14:creationId xmlns:p14="http://schemas.microsoft.com/office/powerpoint/2010/main" val="3575007528"/>
       </p:ext>
     </p:extLst>
   </p:cSld>
@@ -1506,7 +1506,7 @@
           <p:cNvPr id="2" name="Title 1">
             <a:extLst>
               <a:ext uri="{FF2B5EF4-FFF2-40B4-BE49-F238E27FC236}">
-                <a16:creationId xmlns:a16="http://schemas.microsoft.com/office/drawing/2014/main" id="{828A1750-0C3A-B4B3-80E8-4C7538EC849D}"/>
+                <a16:creationId xmlns:a16="http://schemas.microsoft.com/office/drawing/2014/main" id="{27B6A242-E885-E01E-2668-26D72ADF188A}"/>
               </a:ext>
             </a:extLst>
           </p:cNvPr>
@@ -1540,7 +1540,7 @@
           <p:cNvPr id="3" name="Text Placeholder 2">
             <a:extLst>
               <a:ext uri="{FF2B5EF4-FFF2-40B4-BE49-F238E27FC236}">
-                <a16:creationId xmlns:a16="http://schemas.microsoft.com/office/drawing/2014/main" id="{59686524-281D-C036-9B35-AF45952E6E5E}"/>
+                <a16:creationId xmlns:a16="http://schemas.microsoft.com/office/drawing/2014/main" id="{32A6243A-C599-162D-AC64-5A8D7141E487}"/>
               </a:ext>
             </a:extLst>
           </p:cNvPr>
@@ -1611,7 +1611,7 @@
           <p:cNvPr id="4" name="Content Placeholder 3">
             <a:extLst>
               <a:ext uri="{FF2B5EF4-FFF2-40B4-BE49-F238E27FC236}">
-                <a16:creationId xmlns:a16="http://schemas.microsoft.com/office/drawing/2014/main" id="{69FE0E11-D67F-9F0E-5732-FD4603AD3153}"/>
+                <a16:creationId xmlns:a16="http://schemas.microsoft.com/office/drawing/2014/main" id="{A43C2014-9F62-BB30-AF13-74AA6498201B}"/>
               </a:ext>
             </a:extLst>
           </p:cNvPr>
@@ -1674,7 +1674,7 @@
           <p:cNvPr id="5" name="Text Placeholder 4">
             <a:extLst>
               <a:ext uri="{FF2B5EF4-FFF2-40B4-BE49-F238E27FC236}">
-                <a16:creationId xmlns:a16="http://schemas.microsoft.com/office/drawing/2014/main" id="{E69B10B4-AF48-1105-7CC5-F724A7CAD2BB}"/>
+                <a16:creationId xmlns:a16="http://schemas.microsoft.com/office/drawing/2014/main" id="{028ACE13-B292-4D8F-AE27-A17DBC87264C}"/>
               </a:ext>
             </a:extLst>
           </p:cNvPr>
@@ -1745,7 +1745,7 @@
           <p:cNvPr id="6" name="Content Placeholder 5">
             <a:extLst>
               <a:ext uri="{FF2B5EF4-FFF2-40B4-BE49-F238E27FC236}">
-                <a16:creationId xmlns:a16="http://schemas.microsoft.com/office/drawing/2014/main" id="{8E8CF6FA-FD0C-E097-2997-A81CA99628AF}"/>
+                <a16:creationId xmlns:a16="http://schemas.microsoft.com/office/drawing/2014/main" id="{30B4AC90-3365-CCEE-62DD-D91374D6841E}"/>
               </a:ext>
             </a:extLst>
           </p:cNvPr>
@@ -1808,7 +1808,7 @@
           <p:cNvPr id="7" name="Date Placeholder 6">
             <a:extLst>
               <a:ext uri="{FF2B5EF4-FFF2-40B4-BE49-F238E27FC236}">
-                <a16:creationId xmlns:a16="http://schemas.microsoft.com/office/drawing/2014/main" id="{A6C0DEF1-DC5A-3867-60CD-D8D6F35D1514}"/>
+                <a16:creationId xmlns:a16="http://schemas.microsoft.com/office/drawing/2014/main" id="{2E535BE6-9077-968E-A961-8E311BBABA04}"/>
               </a:ext>
             </a:extLst>
           </p:cNvPr>
@@ -1824,9 +1824,9 @@
           <a:bodyPr/>
           <a:lstStyle/>
           <a:p>
-            <a:fld id="{AD2783CA-6D73-4D0A-ABF8-35B96CFF689C}" type="datetimeFigureOut">
+            <a:fld id="{961963D1-593A-43BF-8347-20539A7EE1EC}" type="datetimeFigureOut">
               <a:rPr lang="id-ID" smtClean="0"/>
-              <a:t>26/06/2026</a:t>
+              <a:t>27/06/2026</a:t>
             </a:fld>
             <a:endParaRPr lang="id-ID"/>
           </a:p>
@@ -1837,7 +1837,7 @@
           <p:cNvPr id="8" name="Footer Placeholder 7">
             <a:extLst>
               <a:ext uri="{FF2B5EF4-FFF2-40B4-BE49-F238E27FC236}">
-                <a16:creationId xmlns:a16="http://schemas.microsoft.com/office/drawing/2014/main" id="{54B6E484-F790-F2B1-8F97-083AE804D0C5}"/>
+                <a16:creationId xmlns:a16="http://schemas.microsoft.com/office/drawing/2014/main" id="{0DFD11BB-FFE2-48BD-38B0-DB6EB63D4363}"/>
               </a:ext>
             </a:extLst>
           </p:cNvPr>
@@ -1862,7 +1862,7 @@
           <p:cNvPr id="9" name="Slide Number Placeholder 8">
             <a:extLst>
               <a:ext uri="{FF2B5EF4-FFF2-40B4-BE49-F238E27FC236}">
-                <a16:creationId xmlns:a16="http://schemas.microsoft.com/office/drawing/2014/main" id="{57A61061-A6FD-BE36-5439-789D28881E9D}"/>
+                <a16:creationId xmlns:a16="http://schemas.microsoft.com/office/drawing/2014/main" id="{EE89F73E-9DE6-7561-A5AF-9142359A5048}"/>
               </a:ext>
             </a:extLst>
           </p:cNvPr>
@@ -1878,7 +1878,7 @@
           <a:bodyPr/>
           <a:lstStyle/>
           <a:p>
-            <a:fld id="{6F6667F1-D0DD-4C9D-AF8F-80804D176A09}" type="slidenum">
+            <a:fld id="{4286C5A5-18D4-4278-8F18-A6DEB4D1F1F4}" type="slidenum">
               <a:rPr lang="id-ID" smtClean="0"/>
               <a:t>‹#›</a:t>
             </a:fld>
@@ -1889,7 +1889,7 @@
     </p:spTree>
     <p:extLst>
       <p:ext uri="{BB962C8B-B14F-4D97-AF65-F5344CB8AC3E}">
-        <p14:creationId xmlns:p14="http://schemas.microsoft.com/office/powerpoint/2010/main" val="3939804099"/>
+        <p14:creationId xmlns:p14="http://schemas.microsoft.com/office/powerpoint/2010/main" val="2401342208"/>
       </p:ext>
     </p:extLst>
   </p:cSld>
@@ -1921,7 +1921,7 @@
           <p:cNvPr id="2" name="Title 1">
             <a:extLst>
               <a:ext uri="{FF2B5EF4-FFF2-40B4-BE49-F238E27FC236}">
-                <a16:creationId xmlns:a16="http://schemas.microsoft.com/office/drawing/2014/main" id="{E14171E8-ED71-C832-1B12-7CC3786327EF}"/>
+                <a16:creationId xmlns:a16="http://schemas.microsoft.com/office/drawing/2014/main" id="{237D88AE-5A7B-5C38-83CB-67181B25B454}"/>
               </a:ext>
             </a:extLst>
           </p:cNvPr>
@@ -1950,7 +1950,7 @@
           <p:cNvPr id="3" name="Date Placeholder 2">
             <a:extLst>
               <a:ext uri="{FF2B5EF4-FFF2-40B4-BE49-F238E27FC236}">
-                <a16:creationId xmlns:a16="http://schemas.microsoft.com/office/drawing/2014/main" id="{7C1ADFF9-20AD-0A17-CCFB-21D29690C58E}"/>
+                <a16:creationId xmlns:a16="http://schemas.microsoft.com/office/drawing/2014/main" id="{0EBC6858-FED8-4152-CB4D-847E48CAE01C}"/>
               </a:ext>
             </a:extLst>
           </p:cNvPr>
@@ -1966,9 +1966,9 @@
           <a:bodyPr/>
           <a:lstStyle/>
           <a:p>
-            <a:fld id="{AD2783CA-6D73-4D0A-ABF8-35B96CFF689C}" type="datetimeFigureOut">
+            <a:fld id="{961963D1-593A-43BF-8347-20539A7EE1EC}" type="datetimeFigureOut">
               <a:rPr lang="id-ID" smtClean="0"/>
-              <a:t>26/06/2026</a:t>
+              <a:t>27/06/2026</a:t>
             </a:fld>
             <a:endParaRPr lang="id-ID"/>
           </a:p>
@@ -1979,7 +1979,7 @@
           <p:cNvPr id="4" name="Footer Placeholder 3">
             <a:extLst>
               <a:ext uri="{FF2B5EF4-FFF2-40B4-BE49-F238E27FC236}">
-                <a16:creationId xmlns:a16="http://schemas.microsoft.com/office/drawing/2014/main" id="{56608831-4DE9-2D54-76D8-A21DA5421631}"/>
+                <a16:creationId xmlns:a16="http://schemas.microsoft.com/office/drawing/2014/main" id="{4058382C-68A2-686F-D8BA-BFDFE0369ADE}"/>
               </a:ext>
             </a:extLst>
           </p:cNvPr>
@@ -2004,7 +2004,7 @@
           <p:cNvPr id="5" name="Slide Number Placeholder 4">
             <a:extLst>
               <a:ext uri="{FF2B5EF4-FFF2-40B4-BE49-F238E27FC236}">
-                <a16:creationId xmlns:a16="http://schemas.microsoft.com/office/drawing/2014/main" id="{7B76110A-FE18-E2EB-E8B4-AE31397F85B2}"/>
+                <a16:creationId xmlns:a16="http://schemas.microsoft.com/office/drawing/2014/main" id="{181C638A-13F5-338B-0601-31171CFF388E}"/>
               </a:ext>
             </a:extLst>
           </p:cNvPr>
@@ -2020,7 +2020,7 @@
           <a:bodyPr/>
           <a:lstStyle/>
           <a:p>
-            <a:fld id="{6F6667F1-D0DD-4C9D-AF8F-80804D176A09}" type="slidenum">
+            <a:fld id="{4286C5A5-18D4-4278-8F18-A6DEB4D1F1F4}" type="slidenum">
               <a:rPr lang="id-ID" smtClean="0"/>
               <a:t>‹#›</a:t>
             </a:fld>
@@ -2031,7 +2031,7 @@
     </p:spTree>
     <p:extLst>
       <p:ext uri="{BB962C8B-B14F-4D97-AF65-F5344CB8AC3E}">
-        <p14:creationId xmlns:p14="http://schemas.microsoft.com/office/powerpoint/2010/main" val="2429302018"/>
+        <p14:creationId xmlns:p14="http://schemas.microsoft.com/office/powerpoint/2010/main" val="3294635076"/>
       </p:ext>
     </p:extLst>
   </p:cSld>
@@ -2063,7 +2063,7 @@
           <p:cNvPr id="2" name="Date Placeholder 1">
             <a:extLst>
               <a:ext uri="{FF2B5EF4-FFF2-40B4-BE49-F238E27FC236}">
-                <a16:creationId xmlns:a16="http://schemas.microsoft.com/office/drawing/2014/main" id="{B9B1636B-CBFF-9728-B90E-8EC8C2F5BB58}"/>
+                <a16:creationId xmlns:a16="http://schemas.microsoft.com/office/drawing/2014/main" id="{3F7C3613-DF33-A31E-C9A5-09437737C76D}"/>
               </a:ext>
             </a:extLst>
           </p:cNvPr>
@@ -2079,9 +2079,9 @@
           <a:bodyPr/>
           <a:lstStyle/>
           <a:p>
-            <a:fld id="{AD2783CA-6D73-4D0A-ABF8-35B96CFF689C}" type="datetimeFigureOut">
+            <a:fld id="{961963D1-593A-43BF-8347-20539A7EE1EC}" type="datetimeFigureOut">
               <a:rPr lang="id-ID" smtClean="0"/>
-              <a:t>26/06/2026</a:t>
+              <a:t>27/06/2026</a:t>
             </a:fld>
             <a:endParaRPr lang="id-ID"/>
           </a:p>
@@ -2092,7 +2092,7 @@
           <p:cNvPr id="3" name="Footer Placeholder 2">
             <a:extLst>
               <a:ext uri="{FF2B5EF4-FFF2-40B4-BE49-F238E27FC236}">
-                <a16:creationId xmlns:a16="http://schemas.microsoft.com/office/drawing/2014/main" id="{8C274B27-4E54-616B-4A86-1D070F0619EA}"/>
+                <a16:creationId xmlns:a16="http://schemas.microsoft.com/office/drawing/2014/main" id="{417B58F1-00FE-0884-84E1-B08B10CE9B89}"/>
               </a:ext>
             </a:extLst>
           </p:cNvPr>
@@ -2117,7 +2117,7 @@
           <p:cNvPr id="4" name="Slide Number Placeholder 3">
             <a:extLst>
               <a:ext uri="{FF2B5EF4-FFF2-40B4-BE49-F238E27FC236}">
-                <a16:creationId xmlns:a16="http://schemas.microsoft.com/office/drawing/2014/main" id="{BA276EDF-3B05-1CF6-4F06-082F544E8385}"/>
+                <a16:creationId xmlns:a16="http://schemas.microsoft.com/office/drawing/2014/main" id="{1B3B0857-69D3-7B6F-95F9-F24865AC48E0}"/>
               </a:ext>
             </a:extLst>
           </p:cNvPr>
@@ -2133,7 +2133,7 @@
           <a:bodyPr/>
           <a:lstStyle/>
           <a:p>
-            <a:fld id="{6F6667F1-D0DD-4C9D-AF8F-80804D176A09}" type="slidenum">
+            <a:fld id="{4286C5A5-18D4-4278-8F18-A6DEB4D1F1F4}" type="slidenum">
               <a:rPr lang="id-ID" smtClean="0"/>
               <a:t>‹#›</a:t>
             </a:fld>
@@ -2144,7 +2144,7 @@
     </p:spTree>
     <p:extLst>
       <p:ext uri="{BB962C8B-B14F-4D97-AF65-F5344CB8AC3E}">
-        <p14:creationId xmlns:p14="http://schemas.microsoft.com/office/powerpoint/2010/main" val="922170333"/>
+        <p14:creationId xmlns:p14="http://schemas.microsoft.com/office/powerpoint/2010/main" val="3363578986"/>
       </p:ext>
     </p:extLst>
   </p:cSld>
@@ -2176,7 +2176,7 @@
           <p:cNvPr id="2" name="Title 1">
             <a:extLst>
               <a:ext uri="{FF2B5EF4-FFF2-40B4-BE49-F238E27FC236}">
-                <a16:creationId xmlns:a16="http://schemas.microsoft.com/office/drawing/2014/main" id="{7AA89817-99EC-AE2B-DB96-F582851A7723}"/>
+                <a16:creationId xmlns:a16="http://schemas.microsoft.com/office/drawing/2014/main" id="{1760FB10-84F1-E591-90EA-A388C94D1629}"/>
               </a:ext>
             </a:extLst>
           </p:cNvPr>
@@ -2214,7 +2214,7 @@
           <p:cNvPr id="3" name="Content Placeholder 2">
             <a:extLst>
               <a:ext uri="{FF2B5EF4-FFF2-40B4-BE49-F238E27FC236}">
-                <a16:creationId xmlns:a16="http://schemas.microsoft.com/office/drawing/2014/main" id="{7732FD62-9AF9-F0A9-DC01-D698A343D373}"/>
+                <a16:creationId xmlns:a16="http://schemas.microsoft.com/office/drawing/2014/main" id="{87014CB9-39C9-0268-D6E0-4680BC667AE6}"/>
               </a:ext>
             </a:extLst>
           </p:cNvPr>
@@ -2305,7 +2305,7 @@
           <p:cNvPr id="4" name="Text Placeholder 3">
             <a:extLst>
               <a:ext uri="{FF2B5EF4-FFF2-40B4-BE49-F238E27FC236}">
-                <a16:creationId xmlns:a16="http://schemas.microsoft.com/office/drawing/2014/main" id="{890D642E-E5A6-8683-0C48-950E5D18030E}"/>
+                <a16:creationId xmlns:a16="http://schemas.microsoft.com/office/drawing/2014/main" id="{AB2B0165-3FAD-C246-B5EE-7D81DC95E742}"/>
               </a:ext>
             </a:extLst>
           </p:cNvPr>
@@ -2376,7 +2376,7 @@
           <p:cNvPr id="5" name="Date Placeholder 4">
             <a:extLst>
               <a:ext uri="{FF2B5EF4-FFF2-40B4-BE49-F238E27FC236}">
-                <a16:creationId xmlns:a16="http://schemas.microsoft.com/office/drawing/2014/main" id="{A0D8A33B-B533-2305-6D12-AC73D8105696}"/>
+                <a16:creationId xmlns:a16="http://schemas.microsoft.com/office/drawing/2014/main" id="{BBB4828E-7342-ACB8-17BC-EE42C01CF244}"/>
               </a:ext>
             </a:extLst>
           </p:cNvPr>
@@ -2392,9 +2392,9 @@
           <a:bodyPr/>
           <a:lstStyle/>
           <a:p>
-            <a:fld id="{AD2783CA-6D73-4D0A-ABF8-35B96CFF689C}" type="datetimeFigureOut">
+            <a:fld id="{961963D1-593A-43BF-8347-20539A7EE1EC}" type="datetimeFigureOut">
               <a:rPr lang="id-ID" smtClean="0"/>
-              <a:t>26/06/2026</a:t>
+              <a:t>27/06/2026</a:t>
             </a:fld>
             <a:endParaRPr lang="id-ID"/>
           </a:p>
@@ -2405,7 +2405,7 @@
           <p:cNvPr id="6" name="Footer Placeholder 5">
             <a:extLst>
               <a:ext uri="{FF2B5EF4-FFF2-40B4-BE49-F238E27FC236}">
-                <a16:creationId xmlns:a16="http://schemas.microsoft.com/office/drawing/2014/main" id="{07998DEE-C08D-7C25-A3F3-192A1ED645E0}"/>
+                <a16:creationId xmlns:a16="http://schemas.microsoft.com/office/drawing/2014/main" id="{9E9DBCA6-8773-9C54-60D3-1E353991F4BC}"/>
               </a:ext>
             </a:extLst>
           </p:cNvPr>
@@ -2430,7 +2430,7 @@
           <p:cNvPr id="7" name="Slide Number Placeholder 6">
             <a:extLst>
               <a:ext uri="{FF2B5EF4-FFF2-40B4-BE49-F238E27FC236}">
-                <a16:creationId xmlns:a16="http://schemas.microsoft.com/office/drawing/2014/main" id="{85A6B29C-45CA-573C-D934-234D6897EF97}"/>
+                <a16:creationId xmlns:a16="http://schemas.microsoft.com/office/drawing/2014/main" id="{E5FFBBD5-4ED7-0B5A-AB8F-5EE7DB3DDFA8}"/>
               </a:ext>
             </a:extLst>
           </p:cNvPr>
@@ -2446,7 +2446,7 @@
           <a:bodyPr/>
           <a:lstStyle/>
           <a:p>
-            <a:fld id="{6F6667F1-D0DD-4C9D-AF8F-80804D176A09}" type="slidenum">
+            <a:fld id="{4286C5A5-18D4-4278-8F18-A6DEB4D1F1F4}" type="slidenum">
               <a:rPr lang="id-ID" smtClean="0"/>
               <a:t>‹#›</a:t>
             </a:fld>
@@ -2457,7 +2457,7 @@
     </p:spTree>
     <p:extLst>
       <p:ext uri="{BB962C8B-B14F-4D97-AF65-F5344CB8AC3E}">
-        <p14:creationId xmlns:p14="http://schemas.microsoft.com/office/powerpoint/2010/main" val="703289842"/>
+        <p14:creationId xmlns:p14="http://schemas.microsoft.com/office/powerpoint/2010/main" val="2865043621"/>
       </p:ext>
     </p:extLst>
   </p:cSld>
@@ -2489,7 +2489,7 @@
           <p:cNvPr id="2" name="Title 1">
             <a:extLst>
               <a:ext uri="{FF2B5EF4-FFF2-40B4-BE49-F238E27FC236}">
-                <a16:creationId xmlns:a16="http://schemas.microsoft.com/office/drawing/2014/main" id="{1106B400-3AD9-7422-7C2B-C1D07AB94764}"/>
+                <a16:creationId xmlns:a16="http://schemas.microsoft.com/office/drawing/2014/main" id="{955A4431-7124-D701-786F-BCDA3B95C166}"/>
               </a:ext>
             </a:extLst>
           </p:cNvPr>
@@ -2527,7 +2527,7 @@
           <p:cNvPr id="3" name="Picture Placeholder 2">
             <a:extLst>
               <a:ext uri="{FF2B5EF4-FFF2-40B4-BE49-F238E27FC236}">
-                <a16:creationId xmlns:a16="http://schemas.microsoft.com/office/drawing/2014/main" id="{9E9C9DA5-560E-AB5D-ACFC-377EBE64BB9D}"/>
+                <a16:creationId xmlns:a16="http://schemas.microsoft.com/office/drawing/2014/main" id="{5597AD40-99CA-6009-36F8-DF3FFED9C959}"/>
               </a:ext>
             </a:extLst>
           </p:cNvPr>
@@ -2594,7 +2594,7 @@
           <p:cNvPr id="4" name="Text Placeholder 3">
             <a:extLst>
               <a:ext uri="{FF2B5EF4-FFF2-40B4-BE49-F238E27FC236}">
-                <a16:creationId xmlns:a16="http://schemas.microsoft.com/office/drawing/2014/main" id="{CABBB5AC-4E07-9BE2-E700-9C78B6734C66}"/>
+                <a16:creationId xmlns:a16="http://schemas.microsoft.com/office/drawing/2014/main" id="{0717C541-8677-0CB7-9764-FBB65F3E90C7}"/>
               </a:ext>
             </a:extLst>
           </p:cNvPr>
@@ -2665,7 +2665,7 @@
           <p:cNvPr id="5" name="Date Placeholder 4">
             <a:extLst>
               <a:ext uri="{FF2B5EF4-FFF2-40B4-BE49-F238E27FC236}">
-                <a16:creationId xmlns:a16="http://schemas.microsoft.com/office/drawing/2014/main" id="{F0CD13A1-12BE-9B44-6A5A-3C7F3CBA4AA8}"/>
+                <a16:creationId xmlns:a16="http://schemas.microsoft.com/office/drawing/2014/main" id="{A5E44702-CB77-261D-BE37-FCA8D983199C}"/>
               </a:ext>
             </a:extLst>
           </p:cNvPr>
@@ -2681,9 +2681,9 @@
           <a:bodyPr/>
           <a:lstStyle/>
           <a:p>
-            <a:fld id="{AD2783CA-6D73-4D0A-ABF8-35B96CFF689C}" type="datetimeFigureOut">
+            <a:fld id="{961963D1-593A-43BF-8347-20539A7EE1EC}" type="datetimeFigureOut">
               <a:rPr lang="id-ID" smtClean="0"/>
-              <a:t>26/06/2026</a:t>
+              <a:t>27/06/2026</a:t>
             </a:fld>
             <a:endParaRPr lang="id-ID"/>
           </a:p>
@@ -2694,7 +2694,7 @@
           <p:cNvPr id="6" name="Footer Placeholder 5">
             <a:extLst>
               <a:ext uri="{FF2B5EF4-FFF2-40B4-BE49-F238E27FC236}">
-                <a16:creationId xmlns:a16="http://schemas.microsoft.com/office/drawing/2014/main" id="{4B3FD303-DEF8-8B72-BDEB-AC0CA590741A}"/>
+                <a16:creationId xmlns:a16="http://schemas.microsoft.com/office/drawing/2014/main" id="{D13299FD-F944-B576-BB15-0C79D459B75F}"/>
               </a:ext>
             </a:extLst>
           </p:cNvPr>
@@ -2719,7 +2719,7 @@
           <p:cNvPr id="7" name="Slide Number Placeholder 6">
             <a:extLst>
               <a:ext uri="{FF2B5EF4-FFF2-40B4-BE49-F238E27FC236}">
-                <a16:creationId xmlns:a16="http://schemas.microsoft.com/office/drawing/2014/main" id="{C1317426-7B21-5D95-BA7A-05750A094E8E}"/>
+                <a16:creationId xmlns:a16="http://schemas.microsoft.com/office/drawing/2014/main" id="{B717E000-6A70-0CCD-BF4F-FB40CE8C748C}"/>
               </a:ext>
             </a:extLst>
           </p:cNvPr>
@@ -2735,7 +2735,7 @@
           <a:bodyPr/>
           <a:lstStyle/>
           <a:p>
-            <a:fld id="{6F6667F1-D0DD-4C9D-AF8F-80804D176A09}" type="slidenum">
+            <a:fld id="{4286C5A5-18D4-4278-8F18-A6DEB4D1F1F4}" type="slidenum">
               <a:rPr lang="id-ID" smtClean="0"/>
               <a:t>‹#›</a:t>
             </a:fld>
@@ -2746,7 +2746,7 @@
     </p:spTree>
     <p:extLst>
       <p:ext uri="{BB962C8B-B14F-4D97-AF65-F5344CB8AC3E}">
-        <p14:creationId xmlns:p14="http://schemas.microsoft.com/office/powerpoint/2010/main" val="1802490459"/>
+        <p14:creationId xmlns:p14="http://schemas.microsoft.com/office/powerpoint/2010/main" val="1175900036"/>
       </p:ext>
     </p:extLst>
   </p:cSld>
@@ -2783,7 +2783,7 @@
           <p:cNvPr id="2" name="Title Placeholder 1">
             <a:extLst>
               <a:ext uri="{FF2B5EF4-FFF2-40B4-BE49-F238E27FC236}">
-                <a16:creationId xmlns:a16="http://schemas.microsoft.com/office/drawing/2014/main" id="{8B8EC480-9B23-D9C3-4925-E2FAC9551928}"/>
+                <a16:creationId xmlns:a16="http://schemas.microsoft.com/office/drawing/2014/main" id="{FD47D960-FB1F-1450-0189-7182F25CE985}"/>
               </a:ext>
             </a:extLst>
           </p:cNvPr>
@@ -2822,7 +2822,7 @@
           <p:cNvPr id="3" name="Text Placeholder 2">
             <a:extLst>
               <a:ext uri="{FF2B5EF4-FFF2-40B4-BE49-F238E27FC236}">
-                <a16:creationId xmlns:a16="http://schemas.microsoft.com/office/drawing/2014/main" id="{0737F315-87B4-EF14-AA3E-30B5B7673B31}"/>
+                <a16:creationId xmlns:a16="http://schemas.microsoft.com/office/drawing/2014/main" id="{6A729EA3-C992-D4C0-D1A2-7593F01C8351}"/>
               </a:ext>
             </a:extLst>
           </p:cNvPr>
@@ -2890,7 +2890,7 @@
           <p:cNvPr id="4" name="Date Placeholder 3">
             <a:extLst>
               <a:ext uri="{FF2B5EF4-FFF2-40B4-BE49-F238E27FC236}">
-                <a16:creationId xmlns:a16="http://schemas.microsoft.com/office/drawing/2014/main" id="{3BF19C9F-BAD1-667D-451F-1501BE485560}"/>
+                <a16:creationId xmlns:a16="http://schemas.microsoft.com/office/drawing/2014/main" id="{BC71B107-7303-684A-DC68-2E2AB2047342}"/>
               </a:ext>
             </a:extLst>
           </p:cNvPr>
@@ -2924,9 +2924,9 @@
             </a:lvl1pPr>
           </a:lstStyle>
           <a:p>
-            <a:fld id="{AD2783CA-6D73-4D0A-ABF8-35B96CFF689C}" type="datetimeFigureOut">
+            <a:fld id="{961963D1-593A-43BF-8347-20539A7EE1EC}" type="datetimeFigureOut">
               <a:rPr lang="id-ID" smtClean="0"/>
-              <a:t>26/06/2026</a:t>
+              <a:t>27/06/2026</a:t>
             </a:fld>
             <a:endParaRPr lang="id-ID"/>
           </a:p>
@@ -2937,7 +2937,7 @@
           <p:cNvPr id="5" name="Footer Placeholder 4">
             <a:extLst>
               <a:ext uri="{FF2B5EF4-FFF2-40B4-BE49-F238E27FC236}">
-                <a16:creationId xmlns:a16="http://schemas.microsoft.com/office/drawing/2014/main" id="{41627737-6C2B-63CA-05AD-6F7BA3E0690E}"/>
+                <a16:creationId xmlns:a16="http://schemas.microsoft.com/office/drawing/2014/main" id="{CB80AE91-F686-7586-4300-471D5C0529E0}"/>
               </a:ext>
             </a:extLst>
           </p:cNvPr>
@@ -2980,7 +2980,7 @@
           <p:cNvPr id="6" name="Slide Number Placeholder 5">
             <a:extLst>
               <a:ext uri="{FF2B5EF4-FFF2-40B4-BE49-F238E27FC236}">
-                <a16:creationId xmlns:a16="http://schemas.microsoft.com/office/drawing/2014/main" id="{81FD61AE-F47B-BC8F-A780-C96BC2709A34}"/>
+                <a16:creationId xmlns:a16="http://schemas.microsoft.com/office/drawing/2014/main" id="{57CD6F23-2A2D-FA1B-411C-FFBC6ECE93CD}"/>
               </a:ext>
             </a:extLst>
           </p:cNvPr>
@@ -3014,7 +3014,7 @@
             </a:lvl1pPr>
           </a:lstStyle>
           <a:p>
-            <a:fld id="{6F6667F1-D0DD-4C9D-AF8F-80804D176A09}" type="slidenum">
+            <a:fld id="{4286C5A5-18D4-4278-8F18-A6DEB4D1F1F4}" type="slidenum">
               <a:rPr lang="id-ID" smtClean="0"/>
               <a:t>‹#›</a:t>
             </a:fld>
@@ -3025,7 +3025,7 @@
     </p:spTree>
     <p:extLst>
       <p:ext uri="{BB962C8B-B14F-4D97-AF65-F5344CB8AC3E}">
-        <p14:creationId xmlns:p14="http://schemas.microsoft.com/office/powerpoint/2010/main" val="2742317320"/>
+        <p14:creationId xmlns:p14="http://schemas.microsoft.com/office/powerpoint/2010/main" val="617024393"/>
       </p:ext>
     </p:extLst>
   </p:cSld>
@@ -3345,10 +3345,10 @@
       </p:grpSpPr>
       <p:sp>
         <p:nvSpPr>
-          <p:cNvPr id="5" name="TextBox 4">
-            <a:extLst>
-              <a:ext uri="{FF2B5EF4-FFF2-40B4-BE49-F238E27FC236}">
-                <a16:creationId xmlns:a16="http://schemas.microsoft.com/office/drawing/2014/main" id="{C48D3894-33F8-34EF-D42D-2EC28277386E}"/>
+          <p:cNvPr id="4" name="TextBox 3">
+            <a:extLst>
+              <a:ext uri="{FF2B5EF4-FFF2-40B4-BE49-F238E27FC236}">
+                <a16:creationId xmlns:a16="http://schemas.microsoft.com/office/drawing/2014/main" id="{06C37F8D-C8DB-ED22-8FD0-EA656F766C73}"/>
               </a:ext>
             </a:extLst>
           </p:cNvPr>
@@ -3357,8 +3357,8 @@
         </p:nvSpPr>
         <p:spPr>
           <a:xfrm>
-            <a:off x="959370" y="599606"/>
-            <a:ext cx="2236510" cy="1569660"/>
+            <a:off x="807424" y="740419"/>
+            <a:ext cx="2122697" cy="1569660"/>
           </a:xfrm>
           <a:prstGeom prst="rect">
             <a:avLst/>
@@ -3376,8 +3376,6 @@
                 <a:solidFill>
                   <a:srgbClr val="7030A0"/>
                 </a:solidFill>
-                <a:latin typeface="Arial" panose="020B0604020202020204" pitchFamily="34" charset="0"/>
-                <a:cs typeface="Arial" panose="020B0604020202020204" pitchFamily="34" charset="0"/>
               </a:rPr>
               <a:t>IDE</a:t>
             </a:r>
@@ -3385,8 +3383,6 @@
               <a:solidFill>
                 <a:srgbClr val="7030A0"/>
               </a:solidFill>
-              <a:latin typeface="Arial" panose="020B0604020202020204" pitchFamily="34" charset="0"/>
-              <a:cs typeface="Arial" panose="020B0604020202020204" pitchFamily="34" charset="0"/>
             </a:endParaRPr>
           </a:p>
         </p:txBody>
@@ -3394,7 +3390,7 @@
     </p:spTree>
     <p:extLst>
       <p:ext uri="{BB962C8B-B14F-4D97-AF65-F5344CB8AC3E}">
-        <p14:creationId xmlns:p14="http://schemas.microsoft.com/office/powerpoint/2010/main" val="2419011588"/>
+        <p14:creationId xmlns:p14="http://schemas.microsoft.com/office/powerpoint/2010/main" val="4114038924"/>
       </p:ext>
     </p:extLst>
   </p:cSld>
@@ -3412,7 +3408,7 @@
         <p:cNvPr id="1" name="">
           <a:extLst>
             <a:ext uri="{FF2B5EF4-FFF2-40B4-BE49-F238E27FC236}">
-              <a16:creationId xmlns:a16="http://schemas.microsoft.com/office/drawing/2014/main" id="{63367370-2E62-7B17-0801-C2A003DED6D8}"/>
+              <a16:creationId xmlns:a16="http://schemas.microsoft.com/office/drawing/2014/main" id="{E8B2DA4A-1B92-F0AD-56FA-075EC729B8D5}"/>
             </a:ext>
           </a:extLst>
         </p:cNvPr>
@@ -3429,10 +3425,10 @@
       </p:grpSpPr>
       <p:sp>
         <p:nvSpPr>
-          <p:cNvPr id="5" name="TextBox 4">
-            <a:extLst>
-              <a:ext uri="{FF2B5EF4-FFF2-40B4-BE49-F238E27FC236}">
-                <a16:creationId xmlns:a16="http://schemas.microsoft.com/office/drawing/2014/main" id="{A92BBDE9-F0DB-63B2-3F2A-0F776CCFD7D2}"/>
+          <p:cNvPr id="4" name="TextBox 3">
+            <a:extLst>
+              <a:ext uri="{FF2B5EF4-FFF2-40B4-BE49-F238E27FC236}">
+                <a16:creationId xmlns:a16="http://schemas.microsoft.com/office/drawing/2014/main" id="{105BF129-519A-2A63-8D8A-CE8F42F11A98}"/>
               </a:ext>
             </a:extLst>
           </p:cNvPr>
@@ -3441,8 +3437,8 @@
         </p:nvSpPr>
         <p:spPr>
           <a:xfrm>
-            <a:off x="10253271" y="584616"/>
-            <a:ext cx="954107" cy="646331"/>
+            <a:off x="9606650" y="740419"/>
+            <a:ext cx="912429" cy="646331"/>
           </a:xfrm>
           <a:prstGeom prst="rect">
             <a:avLst/>
@@ -3460,8 +3456,6 @@
                 <a:solidFill>
                   <a:srgbClr val="7030A0"/>
                 </a:solidFill>
-                <a:latin typeface="Arial" panose="020B0604020202020204" pitchFamily="34" charset="0"/>
-                <a:cs typeface="Arial" panose="020B0604020202020204" pitchFamily="34" charset="0"/>
               </a:rPr>
               <a:t>IDE</a:t>
             </a:r>
@@ -3469,8 +3463,6 @@
               <a:solidFill>
                 <a:srgbClr val="7030A0"/>
               </a:solidFill>
-              <a:latin typeface="Arial" panose="020B0604020202020204" pitchFamily="34" charset="0"/>
-              <a:cs typeface="Arial" panose="020B0604020202020204" pitchFamily="34" charset="0"/>
             </a:endParaRPr>
           </a:p>
         </p:txBody>
@@ -3480,7 +3472,7 @@
           <p:cNvPr id="2" name="TextBox 1">
             <a:extLst>
               <a:ext uri="{FF2B5EF4-FFF2-40B4-BE49-F238E27FC236}">
-                <a16:creationId xmlns:a16="http://schemas.microsoft.com/office/drawing/2014/main" id="{C2628D38-55DE-006D-90FE-BF69B679E381}"/>
+                <a16:creationId xmlns:a16="http://schemas.microsoft.com/office/drawing/2014/main" id="{96254608-B121-B032-4562-A2A488A15437}"/>
               </a:ext>
             </a:extLst>
           </p:cNvPr>
@@ -3489,8 +3481,8 @@
         </p:nvSpPr>
         <p:spPr>
           <a:xfrm>
-            <a:off x="6720059" y="1230947"/>
-            <a:ext cx="4487319" cy="400110"/>
+            <a:off x="6287461" y="1364425"/>
+            <a:ext cx="4676473" cy="400110"/>
           </a:xfrm>
           <a:prstGeom prst="rect">
             <a:avLst/>
@@ -3511,17 +3503,17 @@
                   </a:schemeClr>
                 </a:solidFill>
               </a:rPr>
-              <a:t>Sebuah gagasan yang mengubah dunia</a:t>
+              <a:t>"Sebuah gagasan yang mengubah dunia"</a:t>
             </a:r>
           </a:p>
         </p:txBody>
       </p:sp>
       <p:pic>
         <p:nvPicPr>
-          <p:cNvPr id="4" name="Picture 3">
-            <a:extLst>
-              <a:ext uri="{FF2B5EF4-FFF2-40B4-BE49-F238E27FC236}">
-                <a16:creationId xmlns:a16="http://schemas.microsoft.com/office/drawing/2014/main" id="{69A7517A-E388-881C-E934-3E270C0DCF79}"/>
+          <p:cNvPr id="5" name="Picture 4">
+            <a:extLst>
+              <a:ext uri="{FF2B5EF4-FFF2-40B4-BE49-F238E27FC236}">
+                <a16:creationId xmlns:a16="http://schemas.microsoft.com/office/drawing/2014/main" id="{15DC44E8-5772-5578-4194-AB7062DEDA99}"/>
               </a:ext>
             </a:extLst>
           </p:cNvPr>
@@ -3530,7 +3522,7 @@
           </p:cNvPicPr>
           <p:nvPr/>
         </p:nvPicPr>
-        <p:blipFill rotWithShape="1">
+        <p:blipFill>
           <a:blip r:embed="rId2">
             <a:extLst>
               <a:ext uri="{28A0092B-C50C-407E-A947-70E740481C1C}">
@@ -3538,17 +3530,16 @@
               </a:ext>
             </a:extLst>
           </a:blip>
-          <a:srcRect l="17972" r="15362"/>
           <a:stretch>
             <a:fillRect/>
           </a:stretch>
         </p:blipFill>
         <p:spPr>
           <a:xfrm>
-            <a:off x="1902501" y="1191717"/>
-            <a:ext cx="4909280" cy="4909280"/>
+            <a:off x="415185" y="1200768"/>
+            <a:ext cx="7314286" cy="4876190"/>
           </a:xfrm>
-          <a:prstGeom prst="flowChartConnector">
+          <a:prstGeom prst="rect">
             <a:avLst/>
           </a:prstGeom>
         </p:spPr>
@@ -3556,7 +3547,7 @@
     </p:spTree>
     <p:extLst>
       <p:ext uri="{BB962C8B-B14F-4D97-AF65-F5344CB8AC3E}">
-        <p14:creationId xmlns:p14="http://schemas.microsoft.com/office/powerpoint/2010/main" val="3554272934"/>
+        <p14:creationId xmlns:p14="http://schemas.microsoft.com/office/powerpoint/2010/main" val="620788595"/>
       </p:ext>
     </p:extLst>
   </p:cSld>
